--- a/EvasionInTheDark.pptx
+++ b/EvasionInTheDark.pptx
@@ -10117,8 +10117,8 @@
         </p:blipFill>
         <p:spPr>
           <a:xfrm>
-            <a:off x="1143000" y="0"/>
-            <a:ext cx="6858000" cy="5143500"/>
+            <a:off x="0" y="0"/>
+            <a:ext cx="9144000" cy="5143500"/>
           </a:xfrm>
           <a:prstGeom prst="rect">
             <a:avLst/>
